--- a/slides/lecture.pptx
+++ b/slides/lecture.pptx
@@ -248,7 +248,7 @@
           <a:p>
             <a:fld id="{E7F142B0-B91C-4CEB-A596-BAFBF7C16CA8}" type="datetimeFigureOut">
               <a:rPr lang="de-CH" smtClean="0"/>
-              <a:t>27.07.2026</a:t>
+              <a:t>28.07.2026</a:t>
             </a:fld>
             <a:endParaRPr lang="de-CH"/>
           </a:p>
@@ -425,7 +425,7 @@
           <a:p>
             <a:fld id="{1AD84D78-5243-4D95-A46D-1A2BEC34DE8C}" type="datetimeFigureOut">
               <a:rPr lang="de-CH" smtClean="0"/>
-              <a:t>27.07.2026</a:t>
+              <a:t>28.07.2026</a:t>
             </a:fld>
             <a:endParaRPr lang="de-CH"/>
           </a:p>
@@ -19083,10 +19083,6 @@
               <a:rPr lang="de-DE" dirty="0" err="1"/>
               <a:t>demo</a:t>
             </a:r>
-            <a:r>
-              <a:rPr lang="de-DE" dirty="0"/>
-              <a:t>?</a:t>
-            </a:r>
             <a:endParaRPr lang="de-CH" dirty="0"/>
           </a:p>
         </p:txBody>
@@ -19112,7 +19108,526 @@
           <a:bodyPr/>
           <a:lstStyle/>
           <a:p>
-            <a:endParaRPr lang="de-CH"/>
+            <a:r>
+              <a:rPr lang="de-DE" sz="1400" b="1" dirty="0"/>
+              <a:t>Task</a:t>
+            </a:r>
+            <a:r>
+              <a:rPr lang="de-DE" sz="1400" dirty="0"/>
+              <a:t>: </a:t>
+            </a:r>
+            <a:r>
+              <a:rPr lang="de-DE" sz="1400" dirty="0" err="1"/>
+              <a:t>You</a:t>
+            </a:r>
+            <a:r>
+              <a:rPr lang="de-DE" sz="1400" dirty="0"/>
+              <a:t> </a:t>
+            </a:r>
+            <a:r>
+              <a:rPr lang="de-DE" sz="1400" dirty="0" err="1"/>
+              <a:t>are</a:t>
+            </a:r>
+            <a:r>
+              <a:rPr lang="de-DE" sz="1400" dirty="0"/>
+              <a:t> </a:t>
+            </a:r>
+            <a:r>
+              <a:rPr lang="de-DE" sz="1400" dirty="0" err="1"/>
+              <a:t>going</a:t>
+            </a:r>
+            <a:r>
+              <a:rPr lang="de-DE" sz="1400" dirty="0"/>
+              <a:t> </a:t>
+            </a:r>
+            <a:r>
+              <a:rPr lang="de-DE" sz="1400" dirty="0" err="1"/>
+              <a:t>to</a:t>
+            </a:r>
+            <a:r>
+              <a:rPr lang="de-DE" sz="1400" dirty="0"/>
+              <a:t> </a:t>
+            </a:r>
+            <a:r>
+              <a:rPr lang="de-DE" sz="1400" dirty="0" err="1"/>
+              <a:t>prepare</a:t>
+            </a:r>
+            <a:r>
+              <a:rPr lang="de-DE" sz="1400" dirty="0"/>
+              <a:t> </a:t>
+            </a:r>
+            <a:r>
+              <a:rPr lang="de-DE" sz="1400" dirty="0" err="1"/>
+              <a:t>population</a:t>
+            </a:r>
+            <a:r>
+              <a:rPr lang="de-DE" sz="1400" dirty="0"/>
+              <a:t> </a:t>
+            </a:r>
+            <a:r>
+              <a:rPr lang="de-DE" sz="1400" dirty="0" err="1"/>
+              <a:t>reports</a:t>
+            </a:r>
+            <a:r>
+              <a:rPr lang="de-DE" sz="1400" dirty="0"/>
+              <a:t> </a:t>
+            </a:r>
+            <a:r>
+              <a:rPr lang="de-DE" sz="1400" dirty="0" err="1"/>
+              <a:t>for</a:t>
+            </a:r>
+            <a:r>
+              <a:rPr lang="de-DE" sz="1400" dirty="0"/>
+              <a:t> all </a:t>
+            </a:r>
+            <a:r>
+              <a:rPr lang="de-DE" sz="1400" dirty="0" err="1"/>
+              <a:t>cantons</a:t>
+            </a:r>
+            <a:r>
+              <a:rPr lang="de-DE" sz="1400" dirty="0"/>
+              <a:t> in </a:t>
+            </a:r>
+            <a:r>
+              <a:rPr lang="de-DE" sz="1400" dirty="0" err="1"/>
+              <a:t>Switzerland</a:t>
+            </a:r>
+            <a:r>
+              <a:rPr lang="de-DE" sz="1400" dirty="0"/>
+              <a:t>.</a:t>
+            </a:r>
+          </a:p>
+          <a:p>
+            <a:r>
+              <a:rPr lang="de-DE" sz="1400" b="1" dirty="0"/>
+              <a:t>Challenge</a:t>
+            </a:r>
+            <a:r>
+              <a:rPr lang="de-DE" sz="1400" dirty="0"/>
+              <a:t>:</a:t>
+            </a:r>
+          </a:p>
+          <a:p>
+            <a:pPr marL="285750" indent="-285750">
+              <a:buFont typeface="Arial" panose="020B0604020202020204" pitchFamily="34" charset="0"/>
+              <a:buChar char="•"/>
+            </a:pPr>
+            <a:r>
+              <a:rPr lang="de-DE" sz="1400" dirty="0" err="1"/>
+              <a:t>Each</a:t>
+            </a:r>
+            <a:r>
+              <a:rPr lang="de-DE" sz="1400" dirty="0"/>
+              <a:t> </a:t>
+            </a:r>
+            <a:r>
+              <a:rPr lang="de-DE" sz="1400" dirty="0" err="1"/>
+              <a:t>canton</a:t>
+            </a:r>
+            <a:r>
+              <a:rPr lang="de-DE" sz="1400" dirty="0"/>
+              <a:t> </a:t>
+            </a:r>
+            <a:r>
+              <a:rPr lang="de-DE" sz="1400" dirty="0" err="1"/>
+              <a:t>has</a:t>
+            </a:r>
+            <a:r>
+              <a:rPr lang="de-DE" sz="1400" dirty="0"/>
+              <a:t> </a:t>
+            </a:r>
+            <a:r>
+              <a:rPr lang="de-DE" sz="1400" dirty="0" err="1"/>
+              <a:t>its</a:t>
+            </a:r>
+            <a:r>
+              <a:rPr lang="de-DE" sz="1400" dirty="0"/>
+              <a:t> own </a:t>
+            </a:r>
+            <a:r>
+              <a:rPr lang="de-DE" sz="1400" dirty="0" err="1"/>
+              <a:t>data</a:t>
+            </a:r>
+            <a:r>
+              <a:rPr lang="de-DE" sz="1400" dirty="0"/>
+              <a:t>, so</a:t>
+            </a:r>
+          </a:p>
+          <a:p>
+            <a:pPr marL="285750" indent="-285750">
+              <a:buFont typeface="Arial" panose="020B0604020202020204" pitchFamily="34" charset="0"/>
+              <a:buChar char="•"/>
+            </a:pPr>
+            <a:r>
+              <a:rPr lang="de-DE" sz="1400" i="1" dirty="0" err="1">
+                <a:effectLst>
+                  <a:outerShdw blurRad="38100" dist="38100" dir="2700000" algn="tl">
+                    <a:srgbClr val="000000">
+                      <a:alpha val="43137"/>
+                    </a:srgbClr>
+                  </a:outerShdw>
+                </a:effectLst>
+              </a:rPr>
+              <a:t>Without</a:t>
+            </a:r>
+            <a:r>
+              <a:rPr lang="de-DE" sz="1400" i="1" dirty="0">
+                <a:effectLst>
+                  <a:outerShdw blurRad="38100" dist="38100" dir="2700000" algn="tl">
+                    <a:srgbClr val="000000">
+                      <a:alpha val="43137"/>
+                    </a:srgbClr>
+                  </a:outerShdw>
+                </a:effectLst>
+              </a:rPr>
+              <a:t> Quarto</a:t>
+            </a:r>
+            <a:r>
+              <a:rPr lang="de-DE" sz="1400" dirty="0"/>
+              <a:t>: </a:t>
+            </a:r>
+            <a:r>
+              <a:rPr lang="de-DE" sz="1400" dirty="0" err="1"/>
+              <a:t>You</a:t>
+            </a:r>
+            <a:r>
+              <a:rPr lang="de-DE" sz="1400" dirty="0"/>
+              <a:t> </a:t>
+            </a:r>
+            <a:r>
+              <a:rPr lang="de-DE" sz="1400" dirty="0" err="1"/>
+              <a:t>might</a:t>
+            </a:r>
+            <a:r>
+              <a:rPr lang="de-DE" sz="1400" dirty="0"/>
+              <a:t> </a:t>
+            </a:r>
+            <a:r>
+              <a:rPr lang="de-DE" sz="1400" dirty="0" err="1"/>
+              <a:t>need</a:t>
+            </a:r>
+            <a:r>
+              <a:rPr lang="de-DE" sz="1400" dirty="0"/>
+              <a:t> </a:t>
+            </a:r>
+            <a:r>
+              <a:rPr lang="de-DE" sz="1400" dirty="0" err="1"/>
+              <a:t>to</a:t>
+            </a:r>
+            <a:r>
+              <a:rPr lang="de-DE" sz="1400" dirty="0"/>
+              <a:t> </a:t>
+            </a:r>
+            <a:r>
+              <a:rPr lang="de-DE" sz="1400" dirty="0" err="1"/>
+              <a:t>create</a:t>
+            </a:r>
+            <a:r>
+              <a:rPr lang="de-DE" sz="1400" dirty="0"/>
+              <a:t> 26 separate Word </a:t>
+            </a:r>
+            <a:r>
+              <a:rPr lang="de-DE" sz="1400" dirty="0" err="1"/>
+              <a:t>documents</a:t>
+            </a:r>
+            <a:r>
+              <a:rPr lang="de-DE" sz="1400" dirty="0"/>
+              <a:t>, </a:t>
+            </a:r>
+            <a:r>
+              <a:rPr lang="de-DE" sz="1400" dirty="0" err="1"/>
+              <a:t>generate</a:t>
+            </a:r>
+            <a:r>
+              <a:rPr lang="de-DE" sz="1400" dirty="0"/>
+              <a:t> </a:t>
+            </a:r>
+            <a:r>
+              <a:rPr lang="de-DE" sz="1400" dirty="0" err="1"/>
+              <a:t>every</a:t>
+            </a:r>
+            <a:r>
+              <a:rPr lang="de-DE" sz="1400" dirty="0"/>
+              <a:t> </a:t>
+            </a:r>
+            <a:r>
+              <a:rPr lang="de-DE" sz="1400" dirty="0" err="1"/>
+              <a:t>single</a:t>
+            </a:r>
+            <a:r>
+              <a:rPr lang="de-DE" sz="1400" dirty="0"/>
+              <a:t> </a:t>
+            </a:r>
+            <a:r>
+              <a:rPr lang="de-DE" sz="1400" dirty="0" err="1"/>
+              <a:t>plot</a:t>
+            </a:r>
+            <a:r>
+              <a:rPr lang="de-DE" sz="1400" dirty="0"/>
+              <a:t>, </a:t>
+            </a:r>
+            <a:r>
+              <a:rPr lang="de-DE" sz="1400" dirty="0" err="1"/>
+              <a:t>copy</a:t>
+            </a:r>
+            <a:r>
+              <a:rPr lang="de-DE" sz="1400" dirty="0"/>
+              <a:t> </a:t>
+            </a:r>
+            <a:r>
+              <a:rPr lang="de-DE" sz="1400" dirty="0" err="1"/>
+              <a:t>paste</a:t>
+            </a:r>
+            <a:r>
+              <a:rPr lang="de-DE" sz="1400" dirty="0"/>
+              <a:t> </a:t>
+            </a:r>
+            <a:r>
+              <a:rPr lang="de-DE" sz="1400" dirty="0" err="1"/>
+              <a:t>them</a:t>
+            </a:r>
+            <a:r>
+              <a:rPr lang="de-DE" sz="1400" dirty="0"/>
+              <a:t> </a:t>
+            </a:r>
+            <a:r>
+              <a:rPr lang="de-DE" sz="1400" dirty="0" err="1"/>
+              <a:t>one</a:t>
+            </a:r>
+            <a:r>
+              <a:rPr lang="de-DE" sz="1400" dirty="0"/>
+              <a:t> </a:t>
+            </a:r>
+            <a:r>
+              <a:rPr lang="de-DE" sz="1400" dirty="0" err="1"/>
+              <a:t>by</a:t>
+            </a:r>
+            <a:r>
+              <a:rPr lang="de-DE" sz="1400" dirty="0"/>
+              <a:t> </a:t>
+            </a:r>
+            <a:r>
+              <a:rPr lang="de-DE" sz="1400" dirty="0" err="1"/>
+              <a:t>one</a:t>
+            </a:r>
+            <a:r>
+              <a:rPr lang="de-DE" sz="1400" dirty="0"/>
+              <a:t> </a:t>
+            </a:r>
+            <a:r>
+              <a:rPr lang="de-DE" sz="1400" dirty="0" err="1"/>
+              <a:t>into</a:t>
+            </a:r>
+            <a:r>
+              <a:rPr lang="de-DE" sz="1400" dirty="0"/>
+              <a:t> </a:t>
+            </a:r>
+            <a:r>
+              <a:rPr lang="de-DE" sz="1400" dirty="0" err="1"/>
+              <a:t>the</a:t>
+            </a:r>
+            <a:r>
+              <a:rPr lang="de-DE" sz="1400" dirty="0"/>
+              <a:t> </a:t>
+            </a:r>
+            <a:r>
+              <a:rPr lang="de-DE" sz="1400" dirty="0" err="1"/>
+              <a:t>documents</a:t>
+            </a:r>
+            <a:r>
+              <a:rPr lang="de-DE" sz="1400" dirty="0"/>
+              <a:t>. The </a:t>
+            </a:r>
+            <a:r>
+              <a:rPr lang="de-DE" sz="1400" dirty="0" err="1"/>
+              <a:t>details</a:t>
+            </a:r>
+            <a:r>
+              <a:rPr lang="de-DE" sz="1400" dirty="0"/>
+              <a:t> (</a:t>
+            </a:r>
+            <a:r>
+              <a:rPr lang="de-DE" sz="1400" dirty="0" err="1"/>
+              <a:t>counts</a:t>
+            </a:r>
+            <a:r>
+              <a:rPr lang="de-DE" sz="1400" dirty="0"/>
+              <a:t>, </a:t>
+            </a:r>
+            <a:r>
+              <a:rPr lang="de-DE" sz="1400" dirty="0" err="1"/>
+              <a:t>names</a:t>
+            </a:r>
+            <a:r>
+              <a:rPr lang="de-DE" sz="1400" dirty="0"/>
+              <a:t>, etc.) in </a:t>
+            </a:r>
+            <a:r>
+              <a:rPr lang="de-DE" sz="1400" dirty="0" err="1"/>
+              <a:t>the</a:t>
+            </a:r>
+            <a:r>
+              <a:rPr lang="de-DE" sz="1400" dirty="0"/>
+              <a:t> </a:t>
+            </a:r>
+            <a:r>
+              <a:rPr lang="de-DE" sz="1400" dirty="0" err="1"/>
+              <a:t>documents</a:t>
+            </a:r>
+            <a:r>
+              <a:rPr lang="de-DE" sz="1400" dirty="0"/>
+              <a:t> </a:t>
+            </a:r>
+            <a:r>
+              <a:rPr lang="de-DE" sz="1400" dirty="0" err="1"/>
+              <a:t>need</a:t>
+            </a:r>
+            <a:r>
+              <a:rPr lang="de-DE" sz="1400" dirty="0"/>
+              <a:t> </a:t>
+            </a:r>
+            <a:r>
+              <a:rPr lang="de-DE" sz="1400" dirty="0" err="1"/>
+              <a:t>to</a:t>
+            </a:r>
+            <a:r>
+              <a:rPr lang="de-DE" sz="1400" dirty="0"/>
+              <a:t> </a:t>
+            </a:r>
+            <a:r>
+              <a:rPr lang="de-DE" sz="1400" dirty="0" err="1"/>
+              <a:t>be</a:t>
+            </a:r>
+            <a:r>
+              <a:rPr lang="de-DE" sz="1400" dirty="0"/>
+              <a:t> </a:t>
+            </a:r>
+            <a:r>
+              <a:rPr lang="de-DE" sz="1400" dirty="0" err="1"/>
+              <a:t>edit</a:t>
+            </a:r>
+            <a:r>
+              <a:rPr lang="de-DE" sz="1400" dirty="0"/>
+              <a:t> </a:t>
+            </a:r>
+            <a:r>
+              <a:rPr lang="de-DE" sz="1400" dirty="0" err="1"/>
+              <a:t>by</a:t>
+            </a:r>
+            <a:r>
+              <a:rPr lang="de-DE" sz="1400" dirty="0"/>
+              <a:t> </a:t>
+            </a:r>
+            <a:r>
+              <a:rPr lang="de-DE" sz="1400" dirty="0" err="1"/>
+              <a:t>hand</a:t>
+            </a:r>
+            <a:r>
+              <a:rPr lang="de-DE" sz="1400" dirty="0"/>
+              <a:t>.</a:t>
+            </a:r>
+          </a:p>
+          <a:p>
+            <a:pPr marL="285750" indent="-285750">
+              <a:buFont typeface="Arial" panose="020B0604020202020204" pitchFamily="34" charset="0"/>
+              <a:buChar char="•"/>
+            </a:pPr>
+            <a:r>
+              <a:rPr lang="de-DE" sz="1400" i="1" dirty="0">
+                <a:effectLst>
+                  <a:outerShdw blurRad="38100" dist="38100" dir="2700000" algn="tl">
+                    <a:srgbClr val="000000">
+                      <a:alpha val="43137"/>
+                    </a:srgbClr>
+                  </a:outerShdw>
+                </a:effectLst>
+              </a:rPr>
+              <a:t>With Quarto</a:t>
+            </a:r>
+            <a:r>
+              <a:rPr lang="de-DE" sz="1400" dirty="0"/>
+              <a:t>: </a:t>
+            </a:r>
+            <a:r>
+              <a:rPr lang="de-DE" sz="1400" dirty="0" err="1"/>
+              <a:t>You</a:t>
+            </a:r>
+            <a:r>
+              <a:rPr lang="de-DE" sz="1400" dirty="0"/>
+              <a:t> </a:t>
+            </a:r>
+            <a:r>
+              <a:rPr lang="de-DE" sz="1400" dirty="0" err="1"/>
+              <a:t>can</a:t>
+            </a:r>
+            <a:r>
+              <a:rPr lang="de-DE" sz="1400" dirty="0"/>
+              <a:t> </a:t>
+            </a:r>
+            <a:r>
+              <a:rPr lang="de-DE" sz="1400" dirty="0" err="1"/>
+              <a:t>create</a:t>
+            </a:r>
+            <a:r>
+              <a:rPr lang="de-DE" sz="1400" dirty="0"/>
+              <a:t> 26 </a:t>
+            </a:r>
+            <a:r>
+              <a:rPr lang="de-DE" sz="1400" dirty="0" err="1"/>
+              <a:t>reports</a:t>
+            </a:r>
+            <a:r>
+              <a:rPr lang="de-DE" sz="1400" dirty="0"/>
+              <a:t> </a:t>
+            </a:r>
+            <a:r>
+              <a:rPr lang="de-DE" sz="1400" dirty="0" err="1"/>
+              <a:t>with</a:t>
+            </a:r>
+            <a:r>
+              <a:rPr lang="de-DE" sz="1400" dirty="0"/>
+              <a:t> a </a:t>
+            </a:r>
+            <a:r>
+              <a:rPr lang="de-DE" sz="1400" dirty="0" err="1"/>
+              <a:t>single</a:t>
+            </a:r>
+            <a:r>
+              <a:rPr lang="de-DE" sz="1400" dirty="0"/>
+              <a:t> </a:t>
+            </a:r>
+            <a:r>
+              <a:rPr lang="de-DE" sz="1400" dirty="0" err="1"/>
+              <a:t>click</a:t>
+            </a:r>
+            <a:r>
+              <a:rPr lang="de-DE" sz="1400" dirty="0"/>
+              <a:t> </a:t>
+            </a:r>
+            <a:r>
+              <a:rPr lang="de-DE" sz="1400" dirty="0" err="1"/>
+              <a:t>using</a:t>
+            </a:r>
+            <a:r>
+              <a:rPr lang="de-DE" sz="1400" dirty="0"/>
+              <a:t> </a:t>
+            </a:r>
+            <a:r>
+              <a:rPr lang="de-DE" sz="1400" dirty="0" err="1"/>
+              <a:t>parametrised</a:t>
+            </a:r>
+            <a:r>
+              <a:rPr lang="de-DE" sz="1400" dirty="0"/>
+              <a:t> </a:t>
+            </a:r>
+            <a:r>
+              <a:rPr lang="de-DE" sz="1400" dirty="0" err="1"/>
+              <a:t>reports</a:t>
+            </a:r>
+            <a:r>
+              <a:rPr lang="de-DE" sz="1400" dirty="0"/>
+              <a:t>.</a:t>
+            </a:r>
           </a:p>
         </p:txBody>
       </p:sp>
@@ -19236,18 +19751,18 @@
       </p:sp>
       <p:sp>
         <p:nvSpPr>
-          <p:cNvPr id="3" name="Text Placeholder 2">
-            <a:extLst>
-              <a:ext uri="{FF2B5EF4-FFF2-40B4-BE49-F238E27FC236}">
-                <a16:creationId xmlns:a16="http://schemas.microsoft.com/office/drawing/2014/main" id="{E324EB96-F3C7-5A57-5117-7754E3D154E8}"/>
-              </a:ext>
-            </a:extLst>
-          </p:cNvPr>
-          <p:cNvSpPr>
-            <a:spLocks noGrp="1"/>
-          </p:cNvSpPr>
-          <p:nvPr>
-            <p:ph type="body" sz="quarter" idx="12"/>
+          <p:cNvPr id="4" name="Text Placeholder 3">
+            <a:extLst>
+              <a:ext uri="{FF2B5EF4-FFF2-40B4-BE49-F238E27FC236}">
+                <a16:creationId xmlns:a16="http://schemas.microsoft.com/office/drawing/2014/main" id="{1F6F4809-E9C7-B4D3-D31D-C9973BA208EA}"/>
+              </a:ext>
+            </a:extLst>
+          </p:cNvPr>
+          <p:cNvSpPr>
+            <a:spLocks noGrp="1"/>
+          </p:cNvSpPr>
+          <p:nvPr>
+            <p:ph type="body" sz="quarter" idx="13"/>
           </p:nvPr>
         </p:nvSpPr>
         <p:spPr/>
@@ -19255,32 +19770,95 @@
           <a:bodyPr/>
           <a:lstStyle/>
           <a:p>
-            <a:endParaRPr lang="de-CH"/>
-          </a:p>
-        </p:txBody>
-      </p:sp>
-      <p:sp>
-        <p:nvSpPr>
-          <p:cNvPr id="4" name="Text Placeholder 3">
-            <a:extLst>
-              <a:ext uri="{FF2B5EF4-FFF2-40B4-BE49-F238E27FC236}">
-                <a16:creationId xmlns:a16="http://schemas.microsoft.com/office/drawing/2014/main" id="{1F6F4809-E9C7-B4D3-D31D-C9973BA208EA}"/>
-              </a:ext>
-            </a:extLst>
-          </p:cNvPr>
-          <p:cNvSpPr>
-            <a:spLocks noGrp="1"/>
-          </p:cNvSpPr>
-          <p:nvPr>
-            <p:ph type="body" sz="quarter" idx="13"/>
-          </p:nvPr>
-        </p:nvSpPr>
-        <p:spPr/>
-        <p:txBody>
-          <a:bodyPr/>
-          <a:lstStyle/>
-          <a:p>
-            <a:endParaRPr lang="de-CH"/>
+            <a:r>
+              <a:rPr lang="de-CH" dirty="0" err="1"/>
+              <a:t>Existing</a:t>
+            </a:r>
+            <a:r>
+              <a:rPr lang="de-CH" dirty="0"/>
+              <a:t> </a:t>
+            </a:r>
+            <a:r>
+              <a:rPr lang="de-CH" dirty="0" err="1"/>
+              <a:t>public</a:t>
+            </a:r>
+            <a:r>
+              <a:rPr lang="de-CH" dirty="0"/>
+              <a:t> </a:t>
+            </a:r>
+            <a:r>
+              <a:rPr lang="de-CH" dirty="0" err="1"/>
+              <a:t>extensions</a:t>
+            </a:r>
+            <a:r>
+              <a:rPr lang="de-CH" dirty="0"/>
+              <a:t>: </a:t>
+            </a:r>
+            <a:r>
+              <a:rPr lang="de-CH" dirty="0">
+                <a:hlinkClick r:id="rId2"/>
+              </a:rPr>
+              <a:t>Quarto </a:t>
+            </a:r>
+            <a:r>
+              <a:rPr lang="de-CH" dirty="0" err="1">
+                <a:hlinkClick r:id="rId2"/>
+              </a:rPr>
+              <a:t>Extensions</a:t>
+            </a:r>
+            <a:r>
+              <a:rPr lang="de-CH" dirty="0">
+                <a:hlinkClick r:id="rId2"/>
+              </a:rPr>
+              <a:t> – Quarto</a:t>
+            </a:r>
+            <a:endParaRPr lang="de-CH" dirty="0"/>
+          </a:p>
+          <a:p>
+            <a:r>
+              <a:rPr lang="de-CH" dirty="0"/>
+              <a:t>And </a:t>
+            </a:r>
+            <a:r>
+              <a:rPr lang="de-CH" dirty="0" err="1"/>
+              <a:t>you</a:t>
+            </a:r>
+            <a:r>
+              <a:rPr lang="de-CH" dirty="0"/>
+              <a:t> </a:t>
+            </a:r>
+            <a:r>
+              <a:rPr lang="de-CH" dirty="0" err="1"/>
+              <a:t>can</a:t>
+            </a:r>
+            <a:r>
+              <a:rPr lang="de-CH" dirty="0"/>
+              <a:t> </a:t>
+            </a:r>
+            <a:r>
+              <a:rPr lang="de-CH" dirty="0" err="1"/>
+              <a:t>create</a:t>
+            </a:r>
+            <a:r>
+              <a:rPr lang="de-CH" dirty="0"/>
+              <a:t> </a:t>
+            </a:r>
+            <a:r>
+              <a:rPr lang="de-CH" dirty="0" err="1"/>
+              <a:t>your</a:t>
+            </a:r>
+            <a:r>
+              <a:rPr lang="de-CH" dirty="0"/>
+              <a:t> personal </a:t>
+            </a:r>
+            <a:r>
+              <a:rPr lang="de-CH" dirty="0" err="1"/>
+              <a:t>extensions</a:t>
+            </a:r>
+            <a:r>
+              <a:rPr lang="de-CH" dirty="0"/>
+              <a:t>…</a:t>
+            </a:r>
           </a:p>
         </p:txBody>
       </p:sp>
@@ -23098,15 +23676,6 @@
 </file>
 
 <file path=customXml/item2.xml><?xml version="1.0" encoding="utf-8"?>
-<?mso-contentType ?>
-<FormTemplates xmlns="http://schemas.microsoft.com/sharepoint/v3/contenttype/forms">
-  <Display>DocumentLibraryForm</Display>
-  <Edit>DocumentLibraryForm</Edit>
-  <New>DocumentLibraryForm</New>
-</FormTemplates>
-</file>
-
-<file path=customXml/item3.xml><?xml version="1.0" encoding="utf-8"?>
 <p:properties xmlns:p="http://schemas.microsoft.com/office/2006/metadata/properties" xmlns:xsi="http://www.w3.org/2001/XMLSchema-instance" xmlns:pc="http://schemas.microsoft.com/office/infopath/2007/PartnerControls">
   <documentManagement>
     <TaxCatchAll xmlns="50ba1161-8fcf-4648-a98a-8cbde4cee383" xsi:nil="true"/>
@@ -23115,6 +23684,15 @@
     </lcf76f155ced4ddcb4097134ff3c332f>
   </documentManagement>
 </p:properties>
+</file>
+
+<file path=customXml/item3.xml><?xml version="1.0" encoding="utf-8"?>
+<?mso-contentType ?>
+<FormTemplates xmlns="http://schemas.microsoft.com/sharepoint/v3/contenttype/forms">
+  <Display>DocumentLibraryForm</Display>
+  <Edit>DocumentLibraryForm</Edit>
+  <New>DocumentLibraryForm</New>
+</FormTemplates>
 </file>
 
 <file path=customXml/itemProps1.xml><?xml version="1.0" encoding="utf-8"?>
@@ -23137,14 +23715,6 @@
 </file>
 
 <file path=customXml/itemProps2.xml><?xml version="1.0" encoding="utf-8"?>
-<ds:datastoreItem xmlns:ds="http://schemas.openxmlformats.org/officeDocument/2006/customXml" ds:itemID="{D55AE8BB-A4BB-4E89-B55D-B4E560473032}">
-  <ds:schemaRefs>
-    <ds:schemaRef ds:uri="http://schemas.microsoft.com/sharepoint/v3/contenttype/forms"/>
-  </ds:schemaRefs>
-</ds:datastoreItem>
-</file>
-
-<file path=customXml/itemProps3.xml><?xml version="1.0" encoding="utf-8"?>
 <ds:datastoreItem xmlns:ds="http://schemas.openxmlformats.org/officeDocument/2006/customXml" ds:itemID="{5710BB5C-7355-4D41-B1BB-CFD6F211FEDD}">
   <ds:schemaRefs>
     <ds:schemaRef ds:uri="http://www.w3.org/XML/1998/namespace"/>
@@ -23161,6 +23731,14 @@
 </ds:datastoreItem>
 </file>
 
+<file path=customXml/itemProps3.xml><?xml version="1.0" encoding="utf-8"?>
+<ds:datastoreItem xmlns:ds="http://schemas.openxmlformats.org/officeDocument/2006/customXml" ds:itemID="{D55AE8BB-A4BB-4E89-B55D-B4E560473032}">
+  <ds:schemaRefs>
+    <ds:schemaRef ds:uri="http://schemas.microsoft.com/sharepoint/v3/contenttype/forms"/>
+  </ds:schemaRefs>
+</ds:datastoreItem>
+</file>
+
 <file path=docMetadata/LabelInfo.xml><?xml version="1.0" encoding="utf-8"?>
 <clbl:labelList xmlns:clbl="http://schemas.microsoft.com/office/2020/mipLabelMetadata">
   <clbl:label id="{a42cdcd0-f576-4592-acdb-6fc911aee612}" enabled="1" method="Privileged" siteId="{9bb8b9bd-971a-4fd3-90c3-c394e2feb8b2}" contentBits="0" removed="0"/>
